--- a/examples/06_gaming_metaverse/Presentation.pptx
+++ b/examples/06_gaming_metaverse/Presentation.pptx
@@ -7,10 +7,9 @@
   <p:sldIdLst>
     <p:sldId id="256" r:id="rId2"/>
     <p:sldId id="257" r:id="rId3"/>
-    <p:sldId id="258" r:id="rId4"/>
   </p:sldIdLst>
   <p:notesMasterIdLst>
-    <p:notesMasterId r:id="rId5"/>
+    <p:notesMasterId r:id="rId4"/>
   </p:notesMasterIdLst>
   <p:sldSz cx="12192000" cy="6858000"/>
   <p:notesSz cx="6858000" cy="12192000"/>
@@ -504,8 +503,8 @@
           <a:p>
             <a:r>
               <a:rPr lang="en-US" dirty="0"/>
-              <a:t>1. Hero
-note: [오프닝] 실시간 LED 월과 언리얼 엔진 5 기반의 차세대 버추얼 프로덕션 파이프라인을 소개합니다.</a:t>
+              <a:t>Slide 1: Cyberpunk HUD Hero
+note: 언리얼 엔진 5 기반 실시간 버추얼 프로덕션 HUD 스펙입니다.</a:t>
             </a:r>
             <a:endParaRPr lang="en-US" dirty="0"/>
           </a:p>
@@ -593,8 +592,7 @@
           <a:p>
             <a:r>
               <a:rPr lang="en-US" dirty="0"/>
-              <a:t>2. Big Stats
-note: [성과] 120FPS 8K 렌더링과 72%의 후반 작업 기간 단축을 달성했습니다.</a:t>
+              <a:t>Slide 2: Cyberpunk Tech Stack</a:t>
             </a:r>
             <a:endParaRPr lang="en-US" dirty="0"/>
           </a:p>
@@ -618,95 +616,6 @@
             <a:fld id="{F7021451-1387-4CA6-816F-3879F97B5CBC}" type="slidenum">
               <a:rPr lang="en-US"/>
               <a:t>2</a:t>
-            </a:fld>
-            <a:endParaRPr lang="en-US"/>
-          </a:p>
-        </p:txBody>
-      </p:sp>
-    </p:spTree>
-    <p:extLst>
-      <p:ext uri="{BB962C8B-B14F-4D97-AF65-F5344CB8AC3E}">
-        <p14:creationId xmlns:p14="http://schemas.microsoft.com/office/powerpoint/2010/main" val="1024086991"/>
-      </p:ext>
-    </p:extLst>
-  </p:cSld>
-  <p:clrMapOvr>
-    <a:masterClrMapping/>
-  </p:clrMapOvr>
-</p:notes>
-</file>
-
-<file path=ppt/notesSlides/notesSlide3.xml><?xml version="1.0" encoding="utf-8"?>
-<p:notes xmlns:a="http://schemas.openxmlformats.org/drawingml/2006/main" xmlns:r="http://schemas.openxmlformats.org/officeDocument/2006/relationships" xmlns:p="http://schemas.openxmlformats.org/presentationml/2006/main">
-  <p:cSld>
-    <p:spTree>
-      <p:nvGrpSpPr>
-        <p:cNvPr id="1" name=""/>
-        <p:cNvGrpSpPr/>
-        <p:nvPr/>
-      </p:nvGrpSpPr>
-      <p:grpSpPr>
-        <a:xfrm>
-          <a:off x="0" y="0"/>
-          <a:ext cx="0" cy="0"/>
-          <a:chOff x="0" y="0"/>
-          <a:chExt cx="0" cy="0"/>
-        </a:xfrm>
-      </p:grpSpPr>
-      <p:sp>
-        <p:nvSpPr>
-          <p:cNvPr id="2" name="Slide Image Placeholder 1"/>
-          <p:cNvSpPr>
-            <a:spLocks noGrp="1" noRot="1" noChangeAspect="1"/>
-          </p:cNvSpPr>
-          <p:nvPr>
-            <p:ph type="sldImg"/>
-          </p:nvPr>
-        </p:nvSpPr>
-        <p:spPr/>
-      </p:sp>
-      <p:sp>
-        <p:nvSpPr>
-          <p:cNvPr id="3" name="Notes Placeholder 2"/>
-          <p:cNvSpPr>
-            <a:spLocks noGrp="1"/>
-          </p:cNvSpPr>
-          <p:nvPr>
-            <p:ph type="body" idx="1"/>
-          </p:nvPr>
-        </p:nvSpPr>
-        <p:spPr/>
-        <p:txBody>
-          <a:bodyPr/>
-          <a:lstStyle/>
-          <a:p>
-            <a:r>
-              <a:rPr lang="en-US" dirty="0"/>
-              <a:t>3. Closing
-note: [마무리] 경청해 주셔서 감사합니다. 질문을 받겠습니다.</a:t>
-            </a:r>
-            <a:endParaRPr lang="en-US" dirty="0"/>
-          </a:p>
-        </p:txBody>
-      </p:sp>
-      <p:sp>
-        <p:nvSpPr>
-          <p:cNvPr id="4" name="Slide Number Placeholder 3"/>
-          <p:cNvSpPr>
-            <a:spLocks noGrp="1"/>
-          </p:cNvSpPr>
-          <p:nvPr>
-            <p:ph type="sldNum" sz="quarter" idx="10"/>
-          </p:nvPr>
-        </p:nvSpPr>
-        <p:spPr/>
-        <p:txBody>
-          <a:bodyPr/>
-          <a:lstStyle/>
-          <a:p>
-            <a:fld id="{F7021451-1387-4CA6-816F-3879F97B5CBC}" type="slidenum">
-              <a:rPr lang="en-US"/>
-              <a:t>3</a:t>
             </a:fld>
             <a:endParaRPr lang="en-US"/>
           </a:p>
@@ -1074,45 +983,6 @@
 <file path=ppt/slides/slide2.xml><?xml version="1.0" encoding="utf-8"?>
 <p:sld xmlns:a="http://schemas.openxmlformats.org/drawingml/2006/main" xmlns:r="http://schemas.openxmlformats.org/officeDocument/2006/relationships" xmlns:p="http://schemas.openxmlformats.org/presentationml/2006/main">
   <p:cSld name="Slide 2">
-    <p:bg>
-      <p:bgPr>
-        <a:blipFill dpi="0" rotWithShape="1">
-          <a:blip r:embed="rId1">
-            <a:lum/>
-          </a:blip>
-          <a:srcRect/>
-          <a:stretch>
-            <a:fillRect/>
-          </a:stretch>
-        </a:blipFill>
-        <a:effectLst/>
-      </p:bgPr>
-    </p:bg>
-    <p:spTree>
-      <p:nvGrpSpPr>
-        <p:cNvPr id="1" name=""/>
-        <p:cNvGrpSpPr/>
-        <p:nvPr/>
-      </p:nvGrpSpPr>
-      <p:grpSpPr>
-        <a:xfrm>
-          <a:off x="0" y="0"/>
-          <a:ext cx="0" cy="0"/>
-          <a:chOff x="0" y="0"/>
-          <a:chExt cx="0" cy="0"/>
-        </a:xfrm>
-      </p:grpSpPr>
-    </p:spTree>
-  </p:cSld>
-  <p:clrMapOvr>
-    <a:masterClrMapping/>
-  </p:clrMapOvr>
-</p:sld>
-</file>
-
-<file path=ppt/slides/slide3.xml><?xml version="1.0" encoding="utf-8"?>
-<p:sld xmlns:a="http://schemas.openxmlformats.org/drawingml/2006/main" xmlns:r="http://schemas.openxmlformats.org/officeDocument/2006/relationships" xmlns:p="http://schemas.openxmlformats.org/presentationml/2006/main">
-  <p:cSld name="Slide 3">
     <p:bg>
       <p:bgPr>
         <a:blipFill dpi="0" rotWithShape="1">

--- a/examples/06_gaming_metaverse/Presentation.pptx
+++ b/examples/06_gaming_metaverse/Presentation.pptx
@@ -503,8 +503,7 @@
           <a:p>
             <a:r>
               <a:rPr lang="en-US" dirty="0"/>
-              <a:t>Slide 1: Cyberpunk HUD Hero
-note: 언리얼 엔진 5 기반 실시간 버추얼 프로덕션 HUD 스펙입니다.</a:t>
+              <a:t>언리얼 엔진 5 기반 실시간 버추얼 프로덕션 HUD 스펙입니다.</a:t>
             </a:r>
             <a:endParaRPr lang="en-US" dirty="0"/>
           </a:p>
@@ -592,7 +591,7 @@
           <a:p>
             <a:r>
               <a:rPr lang="en-US" dirty="0"/>
-              <a:t>Slide 2: Cyberpunk Tech Stack</a:t>
+              <a:t/>
             </a:r>
             <a:endParaRPr lang="en-US" dirty="0"/>
           </a:p>
@@ -946,16 +945,9 @@
   <p:cSld name="Slide 1">
     <p:bg>
       <p:bgPr>
-        <a:blipFill dpi="0" rotWithShape="1">
-          <a:blip r:embed="rId1">
-            <a:lum/>
-          </a:blip>
-          <a:srcRect/>
-          <a:stretch>
-            <a:fillRect/>
-          </a:stretch>
-        </a:blipFill>
-        <a:effectLst/>
+        <a:solidFill>
+          <a:srgbClr val="0D021A"/>
+        </a:solidFill>
       </p:bgPr>
     </p:bg>
     <p:spTree>
@@ -972,6 +964,639 @@
           <a:chExt cx="0" cy="0"/>
         </a:xfrm>
       </p:grpSpPr>
+      <p:sp>
+        <p:nvSpPr>
+          <p:cNvPr id="2" name="Shape 0"/>
+          <p:cNvSpPr/>
+          <p:nvPr/>
+        </p:nvSpPr>
+        <p:spPr>
+          <a:xfrm>
+            <a:off x="476220" y="428671"/>
+            <a:ext cx="5895228" cy="406085"/>
+          </a:xfrm>
+          <a:prstGeom prst="rect">
+            <a:avLst/>
+          </a:prstGeom>
+          <a:ln w="9525">
+            <a:solidFill>
+              <a:srgbClr val="EC4899"/>
+            </a:solidFill>
+            <a:prstDash val="solid"/>
+          </a:ln>
+        </p:spPr>
+      </p:sp>
+      <p:sp>
+        <p:nvSpPr>
+          <p:cNvPr id="3" name="Text 1"/>
+          <p:cNvSpPr txBox="1"/>
+          <p:nvPr/>
+        </p:nvSpPr>
+        <p:spPr>
+          <a:xfrm>
+            <a:off x="561990" y="468539"/>
+            <a:ext cx="6159581" cy="310805"/>
+          </a:xfrm>
+          <a:prstGeom prst="rect">
+            <a:avLst/>
+          </a:prstGeom>
+          <a:noFill/>
+          <a:ln/>
+        </p:spPr>
+        <p:txBody>
+          <a:bodyPr wrap="none" lIns="0" tIns="0" rIns="0" bIns="0" rtlCol="0" anchor="t"/>
+          <a:lstStyle/>
+          <a:p>
+            <a:pPr algn="l" indent="0" marL="0">
+              <a:lnSpc>
+                <a:spcPts val="2447"/>
+              </a:lnSpc>
+              <a:buNone/>
+            </a:pPr>
+            <a:r>
+              <a:rPr lang="en-US" sz="1631" spc="245" kern="0" dirty="0">
+                <a:solidFill>
+                  <a:srgbClr val="EC4899"/>
+                </a:solidFill>
+                <a:latin typeface="Arial" pitchFamily="34" charset="0"/>
+                <a:ea typeface="Arial" pitchFamily="34" charset="-122"/>
+                <a:cs typeface="Arial" pitchFamily="34" charset="-120"/>
+              </a:rPr>
+              <a:t>UNREAL ENGINE 5.4 // ICVFX PIPELINE</a:t>
+            </a:r>
+            <a:endParaRPr lang="en-US" sz="1631" dirty="0"/>
+          </a:p>
+        </p:txBody>
+      </p:sp>
+      <p:sp>
+        <p:nvSpPr>
+          <p:cNvPr id="4" name="Text 2"/>
+          <p:cNvSpPr txBox="1"/>
+          <p:nvPr/>
+        </p:nvSpPr>
+        <p:spPr>
+          <a:xfrm>
+            <a:off x="457200" y="902421"/>
+            <a:ext cx="11277570" cy="1519276"/>
+          </a:xfrm>
+          <a:prstGeom prst="rect">
+            <a:avLst/>
+          </a:prstGeom>
+          <a:noFill/>
+          <a:ln/>
+        </p:spPr>
+        <p:txBody>
+          <a:bodyPr wrap="square" lIns="0" tIns="0" rIns="0" bIns="0" rtlCol="0" anchor="t"/>
+          <a:lstStyle/>
+          <a:p>
+            <a:pPr algn="l" indent="0" marL="0">
+              <a:lnSpc>
+                <a:spcPts val="5981"/>
+              </a:lnSpc>
+              <a:buNone/>
+            </a:pPr>
+            <a:r>
+              <a:rPr lang="en-US" sz="4785" b="1" spc="-54" kern="0" dirty="0">
+                <a:solidFill>
+                  <a:srgbClr val="FFFFFF"/>
+                </a:solidFill>
+                <a:latin typeface="Malgun Gothic" pitchFamily="34" charset="0"/>
+                <a:ea typeface="Malgun Gothic" pitchFamily="34" charset="-122"/>
+                <a:cs typeface="Malgun Gothic" pitchFamily="34" charset="-120"/>
+              </a:rPr>
+              <a:t>실시간 버추얼 프로덕션</a:t>
+            </a:r>
+            <a:endParaRPr lang="en-US" sz="4785" dirty="0"/>
+          </a:p>
+          <a:p>
+            <a:pPr algn="l" indent="0" marL="0">
+              <a:lnSpc>
+                <a:spcPts val="5981"/>
+              </a:lnSpc>
+              <a:buNone/>
+            </a:pPr>
+            <a:r>
+              <a:rPr lang="en-US" sz="4785" b="1" spc="-54" kern="0" dirty="0">
+                <a:solidFill>
+                  <a:srgbClr val="EC4899"/>
+                </a:solidFill>
+                <a:latin typeface="Malgun Gothic" pitchFamily="34" charset="0"/>
+                <a:ea typeface="Malgun Gothic" pitchFamily="34" charset="-122"/>
+                <a:cs typeface="Malgun Gothic" pitchFamily="34" charset="-120"/>
+              </a:rPr>
+              <a:t>8K 120FPS 차세대 렌더링 엔진</a:t>
+            </a:r>
+            <a:endParaRPr lang="en-US" sz="4785" dirty="0"/>
+          </a:p>
+        </p:txBody>
+      </p:sp>
+      <p:sp>
+        <p:nvSpPr>
+          <p:cNvPr id="5" name="Text 3"/>
+          <p:cNvSpPr txBox="1"/>
+          <p:nvPr/>
+        </p:nvSpPr>
+        <p:spPr>
+          <a:xfrm>
+            <a:off x="457200" y="2679558"/>
+            <a:ext cx="12157680" cy="217170"/>
+          </a:xfrm>
+          <a:prstGeom prst="rect">
+            <a:avLst/>
+          </a:prstGeom>
+          <a:noFill/>
+          <a:ln/>
+        </p:spPr>
+        <p:txBody>
+          <a:bodyPr wrap="none" lIns="0" tIns="0" rIns="0" bIns="0" rtlCol="0" anchor="t"/>
+          <a:lstStyle/>
+          <a:p>
+            <a:pPr algn="l" indent="0" marL="0">
+              <a:lnSpc>
+                <a:spcPts val="1710"/>
+              </a:lnSpc>
+              <a:buNone/>
+            </a:pPr>
+            <a:r>
+              <a:rPr lang="en-US" sz="1140" spc="-54" kern="0" dirty="0">
+                <a:solidFill>
+                  <a:srgbClr val="C084FC"/>
+                </a:solidFill>
+                <a:latin typeface="Malgun Gothic" pitchFamily="34" charset="0"/>
+                <a:ea typeface="Malgun Gothic" pitchFamily="34" charset="-122"/>
+                <a:cs typeface="Malgun Gothic" pitchFamily="34" charset="-120"/>
+              </a:rPr>
+              <a:t>Nanite와 Lumen을 결합한 영화급 인카메라 시각효과(VFX) 스튜디오 아키텍처</a:t>
+            </a:r>
+            <a:endParaRPr lang="en-US" sz="1140" dirty="0"/>
+          </a:p>
+        </p:txBody>
+      </p:sp>
+      <p:sp>
+        <p:nvSpPr>
+          <p:cNvPr id="6" name="Shape 4"/>
+          <p:cNvSpPr/>
+          <p:nvPr/>
+        </p:nvSpPr>
+        <p:spPr>
+          <a:xfrm>
+            <a:off x="476220" y="5272522"/>
+            <a:ext cx="3644798" cy="1166317"/>
+          </a:xfrm>
+          <a:prstGeom prst="roundRect">
+            <a:avLst>
+              <a:gd name="adj" fmla="val 3269"/>
+            </a:avLst>
+          </a:prstGeom>
+          <a:solidFill>
+            <a:srgbClr val="1E0A37">
+              <a:alpha val="85000"/>
+            </a:srgbClr>
+          </a:solidFill>
+          <a:ln w="19050">
+            <a:solidFill>
+              <a:srgbClr val="8B5CF6"/>
+            </a:solidFill>
+            <a:prstDash val="solid"/>
+          </a:ln>
+        </p:spPr>
+      </p:sp>
+      <p:sp>
+        <p:nvSpPr>
+          <p:cNvPr id="7" name="Text 5"/>
+          <p:cNvSpPr txBox="1"/>
+          <p:nvPr/>
+        </p:nvSpPr>
+        <p:spPr>
+          <a:xfrm>
+            <a:off x="628650" y="5442692"/>
+            <a:ext cx="3585180" cy="164592"/>
+          </a:xfrm>
+          <a:prstGeom prst="rect">
+            <a:avLst/>
+          </a:prstGeom>
+          <a:noFill/>
+          <a:ln/>
+        </p:spPr>
+        <p:txBody>
+          <a:bodyPr wrap="none" lIns="0" tIns="0" rIns="0" bIns="0" rtlCol="0" anchor="t"/>
+          <a:lstStyle/>
+          <a:p>
+            <a:pPr algn="l" indent="0" marL="0">
+              <a:lnSpc>
+                <a:spcPts val="1296"/>
+              </a:lnSpc>
+              <a:buNone/>
+            </a:pPr>
+            <a:r>
+              <a:rPr lang="en-US" sz="864" spc="-54" kern="0" dirty="0">
+                <a:solidFill>
+                  <a:srgbClr val="EC4899"/>
+                </a:solidFill>
+                <a:latin typeface="Arial" pitchFamily="34" charset="0"/>
+                <a:ea typeface="Arial" pitchFamily="34" charset="-122"/>
+                <a:cs typeface="Arial" pitchFamily="34" charset="-120"/>
+              </a:rPr>
+              <a:t>RENDER LATENCY</a:t>
+            </a:r>
+            <a:endParaRPr lang="en-US" sz="864" dirty="0"/>
+          </a:p>
+        </p:txBody>
+      </p:sp>
+      <p:sp>
+        <p:nvSpPr>
+          <p:cNvPr id="8" name="Text 6"/>
+          <p:cNvSpPr txBox="1"/>
+          <p:nvPr/>
+        </p:nvSpPr>
+        <p:spPr>
+          <a:xfrm>
+            <a:off x="628650" y="5640842"/>
+            <a:ext cx="3585180" cy="411480"/>
+          </a:xfrm>
+          <a:prstGeom prst="rect">
+            <a:avLst/>
+          </a:prstGeom>
+          <a:noFill/>
+          <a:ln/>
+        </p:spPr>
+        <p:txBody>
+          <a:bodyPr wrap="none" lIns="0" tIns="0" rIns="0" bIns="0" rtlCol="0" anchor="t"/>
+          <a:lstStyle/>
+          <a:p>
+            <a:pPr algn="l" indent="0" marL="0">
+              <a:lnSpc>
+                <a:spcPts val="3240"/>
+              </a:lnSpc>
+              <a:buNone/>
+            </a:pPr>
+            <a:r>
+              <a:rPr lang="en-US" sz="2160" b="1" spc="-54" kern="0" dirty="0">
+                <a:solidFill>
+                  <a:srgbClr val="FFFFFF"/>
+                </a:solidFill>
+                <a:latin typeface="Arial" pitchFamily="34" charset="0"/>
+                <a:ea typeface="Arial" pitchFamily="34" charset="-122"/>
+                <a:cs typeface="Arial" pitchFamily="34" charset="-120"/>
+              </a:rPr>
+              <a:t>3.8 ms</a:t>
+            </a:r>
+            <a:endParaRPr lang="en-US" sz="2160" dirty="0"/>
+          </a:p>
+        </p:txBody>
+      </p:sp>
+      <p:sp>
+        <p:nvSpPr>
+          <p:cNvPr id="9" name="Text 7"/>
+          <p:cNvSpPr txBox="1"/>
+          <p:nvPr/>
+        </p:nvSpPr>
+        <p:spPr>
+          <a:xfrm>
+            <a:off x="628650" y="6091276"/>
+            <a:ext cx="3585180" cy="171450"/>
+          </a:xfrm>
+          <a:prstGeom prst="rect">
+            <a:avLst/>
+          </a:prstGeom>
+          <a:noFill/>
+          <a:ln/>
+        </p:spPr>
+        <p:txBody>
+          <a:bodyPr wrap="none" lIns="0" tIns="0" rIns="0" bIns="0" rtlCol="0" anchor="t"/>
+          <a:lstStyle/>
+          <a:p>
+            <a:pPr algn="l" indent="0" marL="0">
+              <a:lnSpc>
+                <a:spcPts val="1350"/>
+              </a:lnSpc>
+              <a:buNone/>
+            </a:pPr>
+            <a:r>
+              <a:rPr lang="en-US" sz="900" spc="-54" kern="0" dirty="0">
+                <a:solidFill>
+                  <a:srgbClr val="D8B4FE"/>
+                </a:solidFill>
+                <a:latin typeface="Malgun Gothic" pitchFamily="34" charset="0"/>
+                <a:ea typeface="Malgun Gothic" pitchFamily="34" charset="-122"/>
+                <a:cs typeface="Malgun Gothic" pitchFamily="34" charset="-120"/>
+              </a:rPr>
+              <a:t>Genlock 카메라 완벽 동기화</a:t>
+            </a:r>
+            <a:endParaRPr lang="en-US" sz="900" dirty="0"/>
+          </a:p>
+        </p:txBody>
+      </p:sp>
+      <p:sp>
+        <p:nvSpPr>
+          <p:cNvPr id="10" name="Shape 8"/>
+          <p:cNvSpPr/>
+          <p:nvPr/>
+        </p:nvSpPr>
+        <p:spPr>
+          <a:xfrm>
+            <a:off x="4273448" y="5272522"/>
+            <a:ext cx="3644890" cy="1166317"/>
+          </a:xfrm>
+          <a:prstGeom prst="roundRect">
+            <a:avLst>
+              <a:gd name="adj" fmla="val 3269"/>
+            </a:avLst>
+          </a:prstGeom>
+          <a:solidFill>
+            <a:srgbClr val="1E0A37">
+              <a:alpha val="85000"/>
+            </a:srgbClr>
+          </a:solidFill>
+          <a:ln w="19050">
+            <a:solidFill>
+              <a:srgbClr val="EC4899"/>
+            </a:solidFill>
+            <a:prstDash val="solid"/>
+          </a:ln>
+        </p:spPr>
+      </p:sp>
+      <p:sp>
+        <p:nvSpPr>
+          <p:cNvPr id="11" name="Text 9"/>
+          <p:cNvSpPr txBox="1"/>
+          <p:nvPr/>
+        </p:nvSpPr>
+        <p:spPr>
+          <a:xfrm>
+            <a:off x="4425879" y="5442692"/>
+            <a:ext cx="3585271" cy="164592"/>
+          </a:xfrm>
+          <a:prstGeom prst="rect">
+            <a:avLst/>
+          </a:prstGeom>
+          <a:noFill/>
+          <a:ln/>
+        </p:spPr>
+        <p:txBody>
+          <a:bodyPr wrap="none" lIns="0" tIns="0" rIns="0" bIns="0" rtlCol="0" anchor="t"/>
+          <a:lstStyle/>
+          <a:p>
+            <a:pPr algn="l" indent="0" marL="0">
+              <a:lnSpc>
+                <a:spcPts val="1296"/>
+              </a:lnSpc>
+              <a:buNone/>
+            </a:pPr>
+            <a:r>
+              <a:rPr lang="en-US" sz="864" spc="-54" kern="0" dirty="0">
+                <a:solidFill>
+                  <a:srgbClr val="C084FC"/>
+                </a:solidFill>
+                <a:latin typeface="Arial" pitchFamily="34" charset="0"/>
+                <a:ea typeface="Arial" pitchFamily="34" charset="-122"/>
+                <a:cs typeface="Arial" pitchFamily="34" charset="-120"/>
+              </a:rPr>
+              <a:t>POST-PROD COST</a:t>
+            </a:r>
+            <a:endParaRPr lang="en-US" sz="864" dirty="0"/>
+          </a:p>
+        </p:txBody>
+      </p:sp>
+      <p:sp>
+        <p:nvSpPr>
+          <p:cNvPr id="12" name="Text 10"/>
+          <p:cNvSpPr txBox="1"/>
+          <p:nvPr/>
+        </p:nvSpPr>
+        <p:spPr>
+          <a:xfrm>
+            <a:off x="4425879" y="5640842"/>
+            <a:ext cx="3585271" cy="411480"/>
+          </a:xfrm>
+          <a:prstGeom prst="rect">
+            <a:avLst/>
+          </a:prstGeom>
+          <a:noFill/>
+          <a:ln/>
+        </p:spPr>
+        <p:txBody>
+          <a:bodyPr wrap="none" lIns="0" tIns="0" rIns="0" bIns="0" rtlCol="0" anchor="t"/>
+          <a:lstStyle/>
+          <a:p>
+            <a:pPr algn="l" indent="0" marL="0">
+              <a:lnSpc>
+                <a:spcPts val="3240"/>
+              </a:lnSpc>
+              <a:buNone/>
+            </a:pPr>
+            <a:r>
+              <a:rPr lang="en-US" sz="2160" b="1" spc="-54" kern="0" dirty="0">
+                <a:solidFill>
+                  <a:srgbClr val="EC4899"/>
+                </a:solidFill>
+                <a:latin typeface="Arial" pitchFamily="34" charset="0"/>
+                <a:ea typeface="Arial" pitchFamily="34" charset="-122"/>
+                <a:cs typeface="Arial" pitchFamily="34" charset="-120"/>
+              </a:rPr>
+              <a:t>-72%</a:t>
+            </a:r>
+            <a:endParaRPr lang="en-US" sz="2160" dirty="0"/>
+          </a:p>
+        </p:txBody>
+      </p:sp>
+      <p:sp>
+        <p:nvSpPr>
+          <p:cNvPr id="13" name="Text 11"/>
+          <p:cNvSpPr txBox="1"/>
+          <p:nvPr/>
+        </p:nvSpPr>
+        <p:spPr>
+          <a:xfrm>
+            <a:off x="4425879" y="6091276"/>
+            <a:ext cx="3585271" cy="171450"/>
+          </a:xfrm>
+          <a:prstGeom prst="rect">
+            <a:avLst/>
+          </a:prstGeom>
+          <a:noFill/>
+          <a:ln/>
+        </p:spPr>
+        <p:txBody>
+          <a:bodyPr wrap="none" lIns="0" tIns="0" rIns="0" bIns="0" rtlCol="0" anchor="t"/>
+          <a:lstStyle/>
+          <a:p>
+            <a:pPr algn="l" indent="0" marL="0">
+              <a:lnSpc>
+                <a:spcPts val="1350"/>
+              </a:lnSpc>
+              <a:buNone/>
+            </a:pPr>
+            <a:r>
+              <a:rPr lang="en-US" sz="900" spc="-54" kern="0" dirty="0">
+                <a:solidFill>
+                  <a:srgbClr val="D8B4FE"/>
+                </a:solidFill>
+                <a:latin typeface="Malgun Gothic" pitchFamily="34" charset="0"/>
+                <a:ea typeface="Malgun Gothic" pitchFamily="34" charset="-122"/>
+                <a:cs typeface="Malgun Gothic" pitchFamily="34" charset="-120"/>
+              </a:rPr>
+              <a:t>현장 즉시 최종 픽셀 완성</a:t>
+            </a:r>
+            <a:endParaRPr lang="en-US" sz="900" dirty="0"/>
+          </a:p>
+        </p:txBody>
+      </p:sp>
+      <p:sp>
+        <p:nvSpPr>
+          <p:cNvPr id="14" name="Shape 12"/>
+          <p:cNvSpPr/>
+          <p:nvPr/>
+        </p:nvSpPr>
+        <p:spPr>
+          <a:xfrm>
+            <a:off x="8070860" y="5272522"/>
+            <a:ext cx="3644798" cy="1166317"/>
+          </a:xfrm>
+          <a:prstGeom prst="roundRect">
+            <a:avLst>
+              <a:gd name="adj" fmla="val 3269"/>
+            </a:avLst>
+          </a:prstGeom>
+          <a:solidFill>
+            <a:srgbClr val="1E0A37">
+              <a:alpha val="85000"/>
+            </a:srgbClr>
+          </a:solidFill>
+          <a:ln w="19050">
+            <a:solidFill>
+              <a:srgbClr val="8B5CF6"/>
+            </a:solidFill>
+            <a:prstDash val="solid"/>
+          </a:ln>
+        </p:spPr>
+      </p:sp>
+      <p:sp>
+        <p:nvSpPr>
+          <p:cNvPr id="15" name="Text 13"/>
+          <p:cNvSpPr txBox="1"/>
+          <p:nvPr/>
+        </p:nvSpPr>
+        <p:spPr>
+          <a:xfrm>
+            <a:off x="8223199" y="5442692"/>
+            <a:ext cx="3585180" cy="164592"/>
+          </a:xfrm>
+          <a:prstGeom prst="rect">
+            <a:avLst/>
+          </a:prstGeom>
+          <a:noFill/>
+          <a:ln/>
+        </p:spPr>
+        <p:txBody>
+          <a:bodyPr wrap="none" lIns="0" tIns="0" rIns="0" bIns="0" rtlCol="0" anchor="t"/>
+          <a:lstStyle/>
+          <a:p>
+            <a:pPr algn="l" indent="0" marL="0">
+              <a:lnSpc>
+                <a:spcPts val="1296"/>
+              </a:lnSpc>
+              <a:buNone/>
+            </a:pPr>
+            <a:r>
+              <a:rPr lang="en-US" sz="864" spc="-54" kern="0" dirty="0">
+                <a:solidFill>
+                  <a:srgbClr val="8B5CF6"/>
+                </a:solidFill>
+                <a:latin typeface="Arial" pitchFamily="34" charset="0"/>
+                <a:ea typeface="Arial" pitchFamily="34" charset="-122"/>
+                <a:cs typeface="Arial" pitchFamily="34" charset="-120"/>
+              </a:rPr>
+              <a:t>LED VOLUME</a:t>
+            </a:r>
+            <a:endParaRPr lang="en-US" sz="864" dirty="0"/>
+          </a:p>
+        </p:txBody>
+      </p:sp>
+      <p:sp>
+        <p:nvSpPr>
+          <p:cNvPr id="16" name="Text 14"/>
+          <p:cNvSpPr txBox="1"/>
+          <p:nvPr/>
+        </p:nvSpPr>
+        <p:spPr>
+          <a:xfrm>
+            <a:off x="8223199" y="5640842"/>
+            <a:ext cx="3585180" cy="411480"/>
+          </a:xfrm>
+          <a:prstGeom prst="rect">
+            <a:avLst/>
+          </a:prstGeom>
+          <a:noFill/>
+          <a:ln/>
+        </p:spPr>
+        <p:txBody>
+          <a:bodyPr wrap="none" lIns="0" tIns="0" rIns="0" bIns="0" rtlCol="0" anchor="t"/>
+          <a:lstStyle/>
+          <a:p>
+            <a:pPr algn="l" indent="0" marL="0">
+              <a:lnSpc>
+                <a:spcPts val="3240"/>
+              </a:lnSpc>
+              <a:buNone/>
+            </a:pPr>
+            <a:r>
+              <a:rPr lang="en-US" sz="2160" b="1" spc="-54" kern="0" dirty="0">
+                <a:solidFill>
+                  <a:srgbClr val="FFFFFF"/>
+                </a:solidFill>
+                <a:latin typeface="Arial" pitchFamily="34" charset="0"/>
+                <a:ea typeface="Arial" pitchFamily="34" charset="-122"/>
+                <a:cs typeface="Arial" pitchFamily="34" charset="-120"/>
+              </a:rPr>
+              <a:t>360° 20m</a:t>
+            </a:r>
+            <a:endParaRPr lang="en-US" sz="2160" dirty="0"/>
+          </a:p>
+        </p:txBody>
+      </p:sp>
+      <p:sp>
+        <p:nvSpPr>
+          <p:cNvPr id="17" name="Text 15"/>
+          <p:cNvSpPr txBox="1"/>
+          <p:nvPr/>
+        </p:nvSpPr>
+        <p:spPr>
+          <a:xfrm>
+            <a:off x="8223199" y="6091276"/>
+            <a:ext cx="3585180" cy="171450"/>
+          </a:xfrm>
+          <a:prstGeom prst="rect">
+            <a:avLst/>
+          </a:prstGeom>
+          <a:noFill/>
+          <a:ln/>
+        </p:spPr>
+        <p:txBody>
+          <a:bodyPr wrap="none" lIns="0" tIns="0" rIns="0" bIns="0" rtlCol="0" anchor="t"/>
+          <a:lstStyle/>
+          <a:p>
+            <a:pPr algn="l" indent="0" marL="0">
+              <a:lnSpc>
+                <a:spcPts val="1350"/>
+              </a:lnSpc>
+              <a:buNone/>
+            </a:pPr>
+            <a:r>
+              <a:rPr lang="en-US" sz="900" spc="-54" kern="0" dirty="0">
+                <a:solidFill>
+                  <a:srgbClr val="D8B4FE"/>
+                </a:solidFill>
+                <a:latin typeface="Malgun Gothic" pitchFamily="34" charset="0"/>
+                <a:ea typeface="Malgun Gothic" pitchFamily="34" charset="-122"/>
+                <a:cs typeface="Malgun Gothic" pitchFamily="34" charset="-120"/>
+              </a:rPr>
+              <a:t>상암 초대형 볼륨 스튜디오</a:t>
+            </a:r>
+            <a:endParaRPr lang="en-US" sz="900" dirty="0"/>
+          </a:p>
+        </p:txBody>
+      </p:sp>
     </p:spTree>
   </p:cSld>
   <p:clrMapOvr>
@@ -985,16 +1610,9 @@
   <p:cSld name="Slide 2">
     <p:bg>
       <p:bgPr>
-        <a:blipFill dpi="0" rotWithShape="1">
-          <a:blip r:embed="rId1">
-            <a:lum/>
-          </a:blip>
-          <a:srcRect/>
-          <a:stretch>
-            <a:fillRect/>
-          </a:stretch>
-        </a:blipFill>
-        <a:effectLst/>
+        <a:solidFill>
+          <a:srgbClr val="0D021A"/>
+        </a:solidFill>
       </p:bgPr>
     </p:bg>
     <p:spTree>
@@ -1011,6 +1629,619 @@
           <a:chExt cx="0" cy="0"/>
         </a:xfrm>
       </p:grpSpPr>
+      <p:sp>
+        <p:nvSpPr>
+          <p:cNvPr id="2" name="Shape 0"/>
+          <p:cNvSpPr/>
+          <p:nvPr/>
+        </p:nvSpPr>
+        <p:spPr>
+          <a:xfrm>
+            <a:off x="476220" y="428671"/>
+            <a:ext cx="6316127" cy="406085"/>
+          </a:xfrm>
+          <a:prstGeom prst="rect">
+            <a:avLst/>
+          </a:prstGeom>
+          <a:ln w="9525">
+            <a:solidFill>
+              <a:srgbClr val="EC4899"/>
+            </a:solidFill>
+            <a:prstDash val="solid"/>
+          </a:ln>
+        </p:spPr>
+      </p:sp>
+      <p:sp>
+        <p:nvSpPr>
+          <p:cNvPr id="3" name="Text 1"/>
+          <p:cNvSpPr txBox="1"/>
+          <p:nvPr/>
+        </p:nvSpPr>
+        <p:spPr>
+          <a:xfrm>
+            <a:off x="561990" y="468539"/>
+            <a:ext cx="6614130" cy="310805"/>
+          </a:xfrm>
+          <a:prstGeom prst="rect">
+            <a:avLst/>
+          </a:prstGeom>
+          <a:noFill/>
+          <a:ln/>
+        </p:spPr>
+        <p:txBody>
+          <a:bodyPr wrap="none" lIns="0" tIns="0" rIns="0" bIns="0" rtlCol="0" anchor="t"/>
+          <a:lstStyle/>
+          <a:p>
+            <a:pPr algn="l" indent="0" marL="0">
+              <a:lnSpc>
+                <a:spcPts val="2447"/>
+              </a:lnSpc>
+              <a:buNone/>
+            </a:pPr>
+            <a:r>
+              <a:rPr lang="en-US" sz="1631" spc="245" kern="0" dirty="0">
+                <a:solidFill>
+                  <a:srgbClr val="EC4899"/>
+                </a:solidFill>
+                <a:latin typeface="Arial" pitchFamily="34" charset="0"/>
+                <a:ea typeface="Arial" pitchFamily="34" charset="-122"/>
+                <a:cs typeface="Arial" pitchFamily="34" charset="-120"/>
+              </a:rPr>
+              <a:t>CORE ARCHITECTURE // NANITE &amp; LUMEN</a:t>
+            </a:r>
+            <a:endParaRPr lang="en-US" sz="1631" dirty="0"/>
+          </a:p>
+        </p:txBody>
+      </p:sp>
+      <p:sp>
+        <p:nvSpPr>
+          <p:cNvPr id="4" name="Text 2"/>
+          <p:cNvSpPr txBox="1"/>
+          <p:nvPr/>
+        </p:nvSpPr>
+        <p:spPr>
+          <a:xfrm>
+            <a:off x="457200" y="887059"/>
+            <a:ext cx="12157680" cy="304770"/>
+          </a:xfrm>
+          <a:prstGeom prst="rect">
+            <a:avLst/>
+          </a:prstGeom>
+          <a:noFill/>
+          <a:ln/>
+        </p:spPr>
+        <p:txBody>
+          <a:bodyPr wrap="none" lIns="0" tIns="0" rIns="0" bIns="0" rtlCol="0" anchor="t"/>
+          <a:lstStyle/>
+          <a:p>
+            <a:pPr algn="l" indent="0" marL="0">
+              <a:lnSpc>
+                <a:spcPts val="2400"/>
+              </a:lnSpc>
+              <a:buNone/>
+            </a:pPr>
+            <a:r>
+              <a:rPr lang="en-US" sz="1920" b="1" spc="-54" kern="0" dirty="0">
+                <a:solidFill>
+                  <a:srgbClr val="FFFFFF"/>
+                </a:solidFill>
+                <a:latin typeface="Malgun Gothic" pitchFamily="34" charset="0"/>
+                <a:ea typeface="Malgun Gothic" pitchFamily="34" charset="-122"/>
+                <a:cs typeface="Malgun Gothic" pitchFamily="34" charset="-120"/>
+              </a:rPr>
+              <a:t>실시간 3D 버추얼 프로덕션 3대 파이프라인</a:t>
+            </a:r>
+            <a:endParaRPr lang="en-US" sz="1920" dirty="0"/>
+          </a:p>
+        </p:txBody>
+      </p:sp>
+      <p:sp>
+        <p:nvSpPr>
+          <p:cNvPr id="5" name="Shape 3"/>
+          <p:cNvSpPr/>
+          <p:nvPr/>
+        </p:nvSpPr>
+        <p:spPr>
+          <a:xfrm>
+            <a:off x="476220" y="3311134"/>
+            <a:ext cx="3644798" cy="978957"/>
+          </a:xfrm>
+          <a:prstGeom prst="roundRect">
+            <a:avLst>
+              <a:gd name="adj" fmla="val 3895"/>
+            </a:avLst>
+          </a:prstGeom>
+          <a:solidFill>
+            <a:srgbClr val="1E0A37">
+              <a:alpha val="85000"/>
+            </a:srgbClr>
+          </a:solidFill>
+          <a:ln w="19050">
+            <a:solidFill>
+              <a:srgbClr val="EC4899"/>
+            </a:solidFill>
+            <a:prstDash val="solid"/>
+          </a:ln>
+        </p:spPr>
+      </p:sp>
+      <p:sp>
+        <p:nvSpPr>
+          <p:cNvPr id="6" name="Text 4"/>
+          <p:cNvSpPr txBox="1"/>
+          <p:nvPr/>
+        </p:nvSpPr>
+        <p:spPr>
+          <a:xfrm>
+            <a:off x="628650" y="3481212"/>
+            <a:ext cx="3585180" cy="164592"/>
+          </a:xfrm>
+          <a:prstGeom prst="rect">
+            <a:avLst/>
+          </a:prstGeom>
+          <a:noFill/>
+          <a:ln/>
+        </p:spPr>
+        <p:txBody>
+          <a:bodyPr wrap="none" lIns="0" tIns="0" rIns="0" bIns="0" rtlCol="0" anchor="t"/>
+          <a:lstStyle/>
+          <a:p>
+            <a:pPr algn="l" indent="0" marL="0">
+              <a:lnSpc>
+                <a:spcPts val="1296"/>
+              </a:lnSpc>
+              <a:buNone/>
+            </a:pPr>
+            <a:r>
+              <a:rPr lang="en-US" sz="864" spc="-54" kern="0" dirty="0">
+                <a:solidFill>
+                  <a:srgbClr val="EC4899"/>
+                </a:solidFill>
+                <a:latin typeface="Arial" pitchFamily="34" charset="0"/>
+                <a:ea typeface="Arial" pitchFamily="34" charset="-122"/>
+                <a:cs typeface="Arial" pitchFamily="34" charset="-120"/>
+              </a:rPr>
+              <a:t>01. ICVFX SYNC</a:t>
+            </a:r>
+            <a:endParaRPr lang="en-US" sz="864" dirty="0"/>
+          </a:p>
+        </p:txBody>
+      </p:sp>
+      <p:sp>
+        <p:nvSpPr>
+          <p:cNvPr id="7" name="Text 5"/>
+          <p:cNvSpPr txBox="1"/>
+          <p:nvPr/>
+        </p:nvSpPr>
+        <p:spPr>
+          <a:xfrm>
+            <a:off x="628650" y="3676528"/>
+            <a:ext cx="3585180" cy="217170"/>
+          </a:xfrm>
+          <a:prstGeom prst="rect">
+            <a:avLst/>
+          </a:prstGeom>
+          <a:noFill/>
+          <a:ln/>
+        </p:spPr>
+        <p:txBody>
+          <a:bodyPr wrap="none" lIns="0" tIns="0" rIns="0" bIns="0" rtlCol="0" anchor="t"/>
+          <a:lstStyle/>
+          <a:p>
+            <a:pPr algn="l" indent="0" marL="0">
+              <a:lnSpc>
+                <a:spcPts val="1710"/>
+              </a:lnSpc>
+              <a:buNone/>
+            </a:pPr>
+            <a:r>
+              <a:rPr lang="en-US" sz="1140" b="1" spc="-54" kern="0" dirty="0">
+                <a:solidFill>
+                  <a:srgbClr val="FFFFFF"/>
+                </a:solidFill>
+                <a:latin typeface="Malgun Gothic" pitchFamily="34" charset="0"/>
+                <a:ea typeface="Malgun Gothic" pitchFamily="34" charset="-122"/>
+                <a:cs typeface="Malgun Gothic" pitchFamily="34" charset="-120"/>
+              </a:rPr>
+              <a:t>인카메라 시각효과</a:t>
+            </a:r>
+            <a:endParaRPr lang="en-US" sz="1140" dirty="0"/>
+          </a:p>
+        </p:txBody>
+      </p:sp>
+      <p:sp>
+        <p:nvSpPr>
+          <p:cNvPr id="8" name="Text 6"/>
+          <p:cNvSpPr txBox="1"/>
+          <p:nvPr/>
+        </p:nvSpPr>
+        <p:spPr>
+          <a:xfrm>
+            <a:off x="628650" y="3932194"/>
+            <a:ext cx="3585180" cy="178308"/>
+          </a:xfrm>
+          <a:prstGeom prst="rect">
+            <a:avLst/>
+          </a:prstGeom>
+          <a:noFill/>
+          <a:ln/>
+        </p:spPr>
+        <p:txBody>
+          <a:bodyPr wrap="none" lIns="0" tIns="0" rIns="0" bIns="0" rtlCol="0" anchor="t"/>
+          <a:lstStyle/>
+          <a:p>
+            <a:pPr algn="l" indent="0" marL="0">
+              <a:lnSpc>
+                <a:spcPts val="1404"/>
+              </a:lnSpc>
+              <a:buNone/>
+            </a:pPr>
+            <a:r>
+              <a:rPr lang="en-US" sz="936" spc="-54" kern="0" dirty="0">
+                <a:solidFill>
+                  <a:srgbClr val="C084FC"/>
+                </a:solidFill>
+                <a:latin typeface="Malgun Gothic" pitchFamily="34" charset="0"/>
+                <a:ea typeface="Malgun Gothic" pitchFamily="34" charset="-122"/>
+                <a:cs typeface="Malgun Gothic" pitchFamily="34" charset="-120"/>
+              </a:rPr>
+              <a:t>카메라 시점에 맞춘 배경 원근 실시간 왜곡 렌더링</a:t>
+            </a:r>
+            <a:endParaRPr lang="en-US" sz="936" dirty="0"/>
+          </a:p>
+        </p:txBody>
+      </p:sp>
+      <p:sp>
+        <p:nvSpPr>
+          <p:cNvPr id="9" name="Shape 7"/>
+          <p:cNvSpPr/>
+          <p:nvPr/>
+        </p:nvSpPr>
+        <p:spPr>
+          <a:xfrm>
+            <a:off x="4273448" y="3311134"/>
+            <a:ext cx="3644890" cy="978957"/>
+          </a:xfrm>
+          <a:prstGeom prst="roundRect">
+            <a:avLst>
+              <a:gd name="adj" fmla="val 3895"/>
+            </a:avLst>
+          </a:prstGeom>
+          <a:solidFill>
+            <a:srgbClr val="1E0A37">
+              <a:alpha val="85000"/>
+            </a:srgbClr>
+          </a:solidFill>
+          <a:ln w="19050">
+            <a:solidFill>
+              <a:srgbClr val="8B5CF6"/>
+            </a:solidFill>
+            <a:prstDash val="solid"/>
+          </a:ln>
+        </p:spPr>
+      </p:sp>
+      <p:sp>
+        <p:nvSpPr>
+          <p:cNvPr id="10" name="Text 8"/>
+          <p:cNvSpPr txBox="1"/>
+          <p:nvPr/>
+        </p:nvSpPr>
+        <p:spPr>
+          <a:xfrm>
+            <a:off x="4425879" y="3481212"/>
+            <a:ext cx="3585271" cy="164592"/>
+          </a:xfrm>
+          <a:prstGeom prst="rect">
+            <a:avLst/>
+          </a:prstGeom>
+          <a:noFill/>
+          <a:ln/>
+        </p:spPr>
+        <p:txBody>
+          <a:bodyPr wrap="none" lIns="0" tIns="0" rIns="0" bIns="0" rtlCol="0" anchor="t"/>
+          <a:lstStyle/>
+          <a:p>
+            <a:pPr algn="l" indent="0" marL="0">
+              <a:lnSpc>
+                <a:spcPts val="1296"/>
+              </a:lnSpc>
+              <a:buNone/>
+            </a:pPr>
+            <a:r>
+              <a:rPr lang="en-US" sz="864" spc="-54" kern="0" dirty="0">
+                <a:solidFill>
+                  <a:srgbClr val="8B5CF6"/>
+                </a:solidFill>
+                <a:latin typeface="Arial" pitchFamily="34" charset="0"/>
+                <a:ea typeface="Arial" pitchFamily="34" charset="-122"/>
+                <a:cs typeface="Arial" pitchFamily="34" charset="-120"/>
+              </a:rPr>
+              <a:t>02. AI ASSET GEN</a:t>
+            </a:r>
+            <a:endParaRPr lang="en-US" sz="864" dirty="0"/>
+          </a:p>
+        </p:txBody>
+      </p:sp>
+      <p:sp>
+        <p:nvSpPr>
+          <p:cNvPr id="11" name="Text 9"/>
+          <p:cNvSpPr txBox="1"/>
+          <p:nvPr/>
+        </p:nvSpPr>
+        <p:spPr>
+          <a:xfrm>
+            <a:off x="4425879" y="3676528"/>
+            <a:ext cx="3585271" cy="217170"/>
+          </a:xfrm>
+          <a:prstGeom prst="rect">
+            <a:avLst/>
+          </a:prstGeom>
+          <a:noFill/>
+          <a:ln/>
+        </p:spPr>
+        <p:txBody>
+          <a:bodyPr wrap="none" lIns="0" tIns="0" rIns="0" bIns="0" rtlCol="0" anchor="t"/>
+          <a:lstStyle/>
+          <a:p>
+            <a:pPr algn="l" indent="0" marL="0">
+              <a:lnSpc>
+                <a:spcPts val="1710"/>
+              </a:lnSpc>
+              <a:buNone/>
+            </a:pPr>
+            <a:r>
+              <a:rPr lang="en-US" sz="1140" b="1" spc="-54" kern="0" dirty="0">
+                <a:solidFill>
+                  <a:srgbClr val="FFFFFF"/>
+                </a:solidFill>
+                <a:latin typeface="Malgun Gothic" pitchFamily="34" charset="0"/>
+                <a:ea typeface="Malgun Gothic" pitchFamily="34" charset="-122"/>
+                <a:cs typeface="Malgun Gothic" pitchFamily="34" charset="-120"/>
+              </a:rPr>
+              <a:t>생성형 3D 에셋</a:t>
+            </a:r>
+            <a:endParaRPr lang="en-US" sz="1140" dirty="0"/>
+          </a:p>
+        </p:txBody>
+      </p:sp>
+      <p:sp>
+        <p:nvSpPr>
+          <p:cNvPr id="12" name="Text 10"/>
+          <p:cNvSpPr txBox="1"/>
+          <p:nvPr/>
+        </p:nvSpPr>
+        <p:spPr>
+          <a:xfrm>
+            <a:off x="4425879" y="3932194"/>
+            <a:ext cx="3585271" cy="178308"/>
+          </a:xfrm>
+          <a:prstGeom prst="rect">
+            <a:avLst/>
+          </a:prstGeom>
+          <a:noFill/>
+          <a:ln/>
+        </p:spPr>
+        <p:txBody>
+          <a:bodyPr wrap="none" lIns="0" tIns="0" rIns="0" bIns="0" rtlCol="0" anchor="t"/>
+          <a:lstStyle/>
+          <a:p>
+            <a:pPr algn="l" indent="0" marL="0">
+              <a:lnSpc>
+                <a:spcPts val="1404"/>
+              </a:lnSpc>
+              <a:buNone/>
+            </a:pPr>
+            <a:r>
+              <a:rPr lang="en-US" sz="936" spc="-54" kern="0" dirty="0">
+                <a:solidFill>
+                  <a:srgbClr val="C084FC"/>
+                </a:solidFill>
+                <a:latin typeface="Malgun Gothic" pitchFamily="34" charset="0"/>
+                <a:ea typeface="Malgun Gothic" pitchFamily="34" charset="-122"/>
+                <a:cs typeface="Malgun Gothic" pitchFamily="34" charset="-120"/>
+              </a:rPr>
+              <a:t>프롬프트 기반 초고해상도 3D 공간 10분 내 인제스트</a:t>
+            </a:r>
+            <a:endParaRPr lang="en-US" sz="936" dirty="0"/>
+          </a:p>
+        </p:txBody>
+      </p:sp>
+      <p:sp>
+        <p:nvSpPr>
+          <p:cNvPr id="13" name="Shape 11"/>
+          <p:cNvSpPr/>
+          <p:nvPr/>
+        </p:nvSpPr>
+        <p:spPr>
+          <a:xfrm>
+            <a:off x="8070860" y="3311134"/>
+            <a:ext cx="3644798" cy="978957"/>
+          </a:xfrm>
+          <a:prstGeom prst="roundRect">
+            <a:avLst>
+              <a:gd name="adj" fmla="val 3895"/>
+            </a:avLst>
+          </a:prstGeom>
+          <a:solidFill>
+            <a:srgbClr val="1E0A37">
+              <a:alpha val="85000"/>
+            </a:srgbClr>
+          </a:solidFill>
+          <a:ln w="19050">
+            <a:solidFill>
+              <a:srgbClr val="EC4899"/>
+            </a:solidFill>
+            <a:prstDash val="solid"/>
+          </a:ln>
+        </p:spPr>
+      </p:sp>
+      <p:sp>
+        <p:nvSpPr>
+          <p:cNvPr id="14" name="Text 12"/>
+          <p:cNvSpPr txBox="1"/>
+          <p:nvPr/>
+        </p:nvSpPr>
+        <p:spPr>
+          <a:xfrm>
+            <a:off x="8223199" y="3481212"/>
+            <a:ext cx="3585180" cy="164592"/>
+          </a:xfrm>
+          <a:prstGeom prst="rect">
+            <a:avLst/>
+          </a:prstGeom>
+          <a:noFill/>
+          <a:ln/>
+        </p:spPr>
+        <p:txBody>
+          <a:bodyPr wrap="none" lIns="0" tIns="0" rIns="0" bIns="0" rtlCol="0" anchor="t"/>
+          <a:lstStyle/>
+          <a:p>
+            <a:pPr algn="l" indent="0" marL="0">
+              <a:lnSpc>
+                <a:spcPts val="1296"/>
+              </a:lnSpc>
+              <a:buNone/>
+            </a:pPr>
+            <a:r>
+              <a:rPr lang="en-US" sz="864" spc="-54" kern="0" dirty="0">
+                <a:solidFill>
+                  <a:srgbClr val="EC4899"/>
+                </a:solidFill>
+                <a:latin typeface="Arial" pitchFamily="34" charset="0"/>
+                <a:ea typeface="Arial" pitchFamily="34" charset="-122"/>
+                <a:cs typeface="Arial" pitchFamily="34" charset="-120"/>
+              </a:rPr>
+              <a:t>03. OPTICAL TRACK</a:t>
+            </a:r>
+            <a:endParaRPr lang="en-US" sz="864" dirty="0"/>
+          </a:p>
+        </p:txBody>
+      </p:sp>
+      <p:sp>
+        <p:nvSpPr>
+          <p:cNvPr id="15" name="Text 13"/>
+          <p:cNvSpPr txBox="1"/>
+          <p:nvPr/>
+        </p:nvSpPr>
+        <p:spPr>
+          <a:xfrm>
+            <a:off x="8223199" y="3676528"/>
+            <a:ext cx="3585180" cy="217170"/>
+          </a:xfrm>
+          <a:prstGeom prst="rect">
+            <a:avLst/>
+          </a:prstGeom>
+          <a:noFill/>
+          <a:ln/>
+        </p:spPr>
+        <p:txBody>
+          <a:bodyPr wrap="none" lIns="0" tIns="0" rIns="0" bIns="0" rtlCol="0" anchor="t"/>
+          <a:lstStyle/>
+          <a:p>
+            <a:pPr algn="l" indent="0" marL="0">
+              <a:lnSpc>
+                <a:spcPts val="1710"/>
+              </a:lnSpc>
+              <a:buNone/>
+            </a:pPr>
+            <a:r>
+              <a:rPr lang="en-US" sz="1140" b="1" spc="-54" kern="0" dirty="0">
+                <a:solidFill>
+                  <a:srgbClr val="FFFFFF"/>
+                </a:solidFill>
+                <a:latin typeface="Malgun Gothic" pitchFamily="34" charset="0"/>
+                <a:ea typeface="Malgun Gothic" pitchFamily="34" charset="-122"/>
+                <a:cs typeface="Malgun Gothic" pitchFamily="34" charset="-120"/>
+              </a:rPr>
+              <a:t>초정밀 모션 트래킹</a:t>
+            </a:r>
+            <a:endParaRPr lang="en-US" sz="1140" dirty="0"/>
+          </a:p>
+        </p:txBody>
+      </p:sp>
+      <p:sp>
+        <p:nvSpPr>
+          <p:cNvPr id="16" name="Text 14"/>
+          <p:cNvSpPr txBox="1"/>
+          <p:nvPr/>
+        </p:nvSpPr>
+        <p:spPr>
+          <a:xfrm>
+            <a:off x="8223199" y="3932194"/>
+            <a:ext cx="3585180" cy="178308"/>
+          </a:xfrm>
+          <a:prstGeom prst="rect">
+            <a:avLst/>
+          </a:prstGeom>
+          <a:noFill/>
+          <a:ln/>
+        </p:spPr>
+        <p:txBody>
+          <a:bodyPr wrap="none" lIns="0" tIns="0" rIns="0" bIns="0" rtlCol="0" anchor="t"/>
+          <a:lstStyle/>
+          <a:p>
+            <a:pPr algn="l" indent="0" marL="0">
+              <a:lnSpc>
+                <a:spcPts val="1404"/>
+              </a:lnSpc>
+              <a:buNone/>
+            </a:pPr>
+            <a:r>
+              <a:rPr lang="en-US" sz="936" spc="-54" kern="0" dirty="0">
+                <a:solidFill>
+                  <a:srgbClr val="C084FC"/>
+                </a:solidFill>
+                <a:latin typeface="Malgun Gothic" pitchFamily="34" charset="0"/>
+                <a:ea typeface="Malgun Gothic" pitchFamily="34" charset="-122"/>
+                <a:cs typeface="Malgun Gothic" pitchFamily="34" charset="-120"/>
+              </a:rPr>
+              <a:t>0.01mm 오차 미만 광학식 센서 트래킹 융합</a:t>
+            </a:r>
+            <a:endParaRPr lang="en-US" sz="936" dirty="0"/>
+          </a:p>
+        </p:txBody>
+      </p:sp>
+      <p:sp>
+        <p:nvSpPr>
+          <p:cNvPr id="17" name="Text 15"/>
+          <p:cNvSpPr txBox="1"/>
+          <p:nvPr/>
+        </p:nvSpPr>
+        <p:spPr>
+          <a:xfrm>
+            <a:off x="-422910" y="6273058"/>
+            <a:ext cx="12157680" cy="164592"/>
+          </a:xfrm>
+          <a:prstGeom prst="rect">
+            <a:avLst/>
+          </a:prstGeom>
+          <a:noFill/>
+          <a:ln/>
+        </p:spPr>
+        <p:txBody>
+          <a:bodyPr wrap="none" lIns="0" tIns="0" rIns="0" bIns="0" rtlCol="0" anchor="t"/>
+          <a:lstStyle/>
+          <a:p>
+            <a:pPr algn="r" indent="0" marL="0">
+              <a:lnSpc>
+                <a:spcPts val="1296"/>
+              </a:lnSpc>
+              <a:buNone/>
+            </a:pPr>
+            <a:r>
+              <a:rPr lang="en-US" sz="864" spc="-54" kern="0" dirty="0">
+                <a:solidFill>
+                  <a:srgbClr val="8B5CF6"/>
+                </a:solidFill>
+                <a:latin typeface="Arial" pitchFamily="34" charset="0"/>
+                <a:ea typeface="Arial" pitchFamily="34" charset="-122"/>
+                <a:cs typeface="Arial" pitchFamily="34" charset="-120"/>
+              </a:rPr>
+              <a:t>SYSTEM STATUS: ONLINE // ZERO LATENCY PIPELINE</a:t>
+            </a:r>
+            <a:endParaRPr lang="en-US" sz="864" dirty="0"/>
+          </a:p>
+        </p:txBody>
+      </p:sp>
     </p:spTree>
   </p:cSld>
   <p:clrMapOvr>
